--- a/testcases/charts-axis-ea-vert.pptx
+++ b/testcases/charts-axis-ea-vert.pptx
@@ -225,7 +225,7 @@
           </c:val>
           <c:extLst>
             <c:ext xmlns:c16="http://schemas.microsoft.com/office/drawing/2014/chart" uri="{C3380CC4-5D6E-409C-BE32-E72D297353CC}">
-              <c16:uniqueId val="{00000000-5BA3-43B6-9EDD-2E7059A07620}"/>
+              <c16:uniqueId val="{00000000-FF88-4B82-86CF-4B05AD69AA37}"/>
             </c:ext>
           </c:extLst>
         </c:ser>
@@ -239,11 +239,11 @@
         </c:dLbls>
         <c:gapWidth val="219"/>
         <c:overlap val="-27"/>
-        <c:axId val="221097759"/>
-        <c:axId val="221093919"/>
+        <c:axId val="1447487840"/>
+        <c:axId val="1447486880"/>
       </c:barChart>
       <c:catAx>
-        <c:axId val="221097759"/>
+        <c:axId val="1447487840"/>
         <c:scaling>
           <c:orientation val="minMax"/>
         </c:scaling>
@@ -267,7 +267,7 @@
           <a:effectLst/>
         </c:spPr>
         <c:txPr>
-          <a:bodyPr rot="-60000000" spcFirstLastPara="1" vertOverflow="ellipsis" vert="horz" wrap="square" anchor="ctr" anchorCtr="1"/>
+          <a:bodyPr spcFirstLastPara="1" vertOverflow="ellipsis" wrap="square" anchor="ctr" anchorCtr="1" rot="0" vert="eaVert"/>
           <a:lstStyle/>
           <a:p>
             <a:pPr>
@@ -286,7 +286,7 @@
             <a:endParaRPr lang="zh-CN"/>
           </a:p>
         </c:txPr>
-        <c:crossAx val="221093919"/>
+        <c:crossAx val="1447486880"/>
         <c:crosses val="autoZero"/>
         <c:auto val="1"/>
         <c:lblAlgn val="ctr"/>
@@ -294,7 +294,7 @@
         <c:noMultiLvlLbl val="0"/>
       </c:catAx>
       <c:valAx>
-        <c:axId val="221093919"/>
+        <c:axId val="1447486880"/>
         <c:scaling>
           <c:orientation val="minMax"/>
         </c:scaling>
@@ -326,7 +326,7 @@
           <a:effectLst/>
         </c:spPr>
         <c:txPr>
-          <a:bodyPr rot="-60000000" spcFirstLastPara="1" vertOverflow="ellipsis" vert="horz" wrap="square" anchor="ctr" anchorCtr="1"/>
+          <a:bodyPr spcFirstLastPara="1" vertOverflow="ellipsis" wrap="square" anchor="ctr" anchorCtr="1" rot="0" vert="eaVert"/>
           <a:lstStyle/>
           <a:p>
             <a:pPr>
@@ -345,7 +345,7 @@
             <a:endParaRPr lang="zh-CN"/>
           </a:p>
         </c:txPr>
-        <c:crossAx val="221097759"/>
+        <c:crossAx val="1447487840"/>
         <c:crosses val="autoZero"/>
         <c:crossBetween val="between"/>
       </c:valAx>
@@ -540,7 +540,7 @@
           </c:val>
           <c:extLst>
             <c:ext xmlns:c16="http://schemas.microsoft.com/office/drawing/2014/chart" uri="{C3380CC4-5D6E-409C-BE32-E72D297353CC}">
-              <c16:uniqueId val="{00000000-D0D1-4C6B-8A45-874B73D30A31}"/>
+              <c16:uniqueId val="{00000000-7CAD-4FC3-AD67-75DBFFD02C0F}"/>
             </c:ext>
           </c:extLst>
         </c:ser>
@@ -554,11 +554,11 @@
         </c:dLbls>
         <c:gapWidth val="219"/>
         <c:overlap val="-27"/>
-        <c:axId val="221091039"/>
-        <c:axId val="221090079"/>
+        <c:axId val="50584943"/>
+        <c:axId val="50588783"/>
       </c:barChart>
       <c:catAx>
-        <c:axId val="221091039"/>
+        <c:axId val="50584943"/>
         <c:scaling>
           <c:orientation val="minMax"/>
         </c:scaling>
@@ -601,7 +601,7 @@
             <a:endParaRPr lang="zh-CN"/>
           </a:p>
         </c:txPr>
-        <c:crossAx val="221090079"/>
+        <c:crossAx val="50588783"/>
         <c:crosses val="autoZero"/>
         <c:auto val="1"/>
         <c:lblAlgn val="ctr"/>
@@ -609,7 +609,7 @@
         <c:noMultiLvlLbl val="0"/>
       </c:catAx>
       <c:valAx>
-        <c:axId val="221090079"/>
+        <c:axId val="50588783"/>
         <c:scaling>
           <c:orientation val="minMax"/>
         </c:scaling>
@@ -660,7 +660,7 @@
             <a:endParaRPr lang="zh-CN"/>
           </a:p>
         </c:txPr>
-        <c:crossAx val="221091039"/>
+        <c:crossAx val="50584943"/>
         <c:crosses val="autoZero"/>
         <c:crossBetween val="between"/>
       </c:valAx>
@@ -1845,7 +1845,7 @@
           <p:cNvPr id="2" name="标题 1">
             <a:extLst>
               <a:ext uri="{FF2B5EF4-FFF2-40B4-BE49-F238E27FC236}">
-                <a16:creationId xmlns:a16="http://schemas.microsoft.com/office/drawing/2014/main" id="{F050498C-F709-ACE8-DB5E-3CDA0C57A386}"/>
+                <a16:creationId xmlns:a16="http://schemas.microsoft.com/office/drawing/2014/main" id="{A82145D3-D852-8ED0-7141-0A056787C76C}"/>
               </a:ext>
             </a:extLst>
           </p:cNvPr>
@@ -1882,7 +1882,7 @@
           <p:cNvPr id="3" name="副标题 2">
             <a:extLst>
               <a:ext uri="{FF2B5EF4-FFF2-40B4-BE49-F238E27FC236}">
-                <a16:creationId xmlns:a16="http://schemas.microsoft.com/office/drawing/2014/main" id="{0AA97297-6BB9-0693-C6FC-0FB7DE1E6C0D}"/>
+                <a16:creationId xmlns:a16="http://schemas.microsoft.com/office/drawing/2014/main" id="{97D8FFEB-3B77-FD8B-EF38-F58967701C5B}"/>
               </a:ext>
             </a:extLst>
           </p:cNvPr>
@@ -1952,7 +1952,7 @@
           <p:cNvPr id="4" name="日期占位符 3">
             <a:extLst>
               <a:ext uri="{FF2B5EF4-FFF2-40B4-BE49-F238E27FC236}">
-                <a16:creationId xmlns:a16="http://schemas.microsoft.com/office/drawing/2014/main" id="{E9E114FD-12F2-2AFD-90DB-784D462DEF0F}"/>
+                <a16:creationId xmlns:a16="http://schemas.microsoft.com/office/drawing/2014/main" id="{45A4934B-172F-C7AC-2BB5-B6BF7504D87E}"/>
               </a:ext>
             </a:extLst>
           </p:cNvPr>
@@ -1968,7 +1968,7 @@
           <a:bodyPr/>
           <a:lstStyle/>
           <a:p>
-            <a:fld id="{6558383F-8533-4D26-9F47-ABC0B8A444BA}" type="datetimeFigureOut">
+            <a:fld id="{D8EADCFA-D2A9-48F2-900D-FB1433C3EF67}" type="datetimeFigureOut">
               <a:rPr lang="zh-CN" altLang="en-US" smtClean="0"/>
               <a:t>2026/10/17</a:t>
             </a:fld>
@@ -1981,7 +1981,7 @@
           <p:cNvPr id="5" name="页脚占位符 4">
             <a:extLst>
               <a:ext uri="{FF2B5EF4-FFF2-40B4-BE49-F238E27FC236}">
-                <a16:creationId xmlns:a16="http://schemas.microsoft.com/office/drawing/2014/main" id="{716E3305-8AD7-5F64-3A2F-B45F5BF98986}"/>
+                <a16:creationId xmlns:a16="http://schemas.microsoft.com/office/drawing/2014/main" id="{5B9A7F23-ABB3-A52D-9438-387AE54B6A0F}"/>
               </a:ext>
             </a:extLst>
           </p:cNvPr>
@@ -2006,7 +2006,7 @@
           <p:cNvPr id="6" name="灯片编号占位符 5">
             <a:extLst>
               <a:ext uri="{FF2B5EF4-FFF2-40B4-BE49-F238E27FC236}">
-                <a16:creationId xmlns:a16="http://schemas.microsoft.com/office/drawing/2014/main" id="{50CE1AEB-D5F9-8A6E-399E-91371FEA7A98}"/>
+                <a16:creationId xmlns:a16="http://schemas.microsoft.com/office/drawing/2014/main" id="{0F4D83A2-AB68-FCDA-CA6B-C1513F6D41EB}"/>
               </a:ext>
             </a:extLst>
           </p:cNvPr>
@@ -2022,7 +2022,7 @@
           <a:bodyPr/>
           <a:lstStyle/>
           <a:p>
-            <a:fld id="{656A01FE-623A-4092-8599-E68D430B7028}" type="slidenum">
+            <a:fld id="{C24BF5A1-B00D-40F6-8260-9C2CE100538A}" type="slidenum">
               <a:rPr lang="zh-CN" altLang="en-US" smtClean="0"/>
               <a:t>‹#›</a:t>
             </a:fld>
@@ -2033,7 +2033,7 @@
     </p:spTree>
     <p:extLst>
       <p:ext uri="{BB962C8B-B14F-4D97-AF65-F5344CB8AC3E}">
-        <p14:creationId xmlns:p14="http://schemas.microsoft.com/office/powerpoint/2010/main" val="520637826"/>
+        <p14:creationId xmlns:p14="http://schemas.microsoft.com/office/powerpoint/2010/main" val="3953555729"/>
       </p:ext>
     </p:extLst>
   </p:cSld>
@@ -2065,7 +2065,7 @@
           <p:cNvPr id="2" name="标题 1">
             <a:extLst>
               <a:ext uri="{FF2B5EF4-FFF2-40B4-BE49-F238E27FC236}">
-                <a16:creationId xmlns:a16="http://schemas.microsoft.com/office/drawing/2014/main" id="{269C2517-87D5-0C57-7BF7-B5D0B3AA586A}"/>
+                <a16:creationId xmlns:a16="http://schemas.microsoft.com/office/drawing/2014/main" id="{9227FA53-D392-8363-9BB2-61584B1E008E}"/>
               </a:ext>
             </a:extLst>
           </p:cNvPr>
@@ -2093,7 +2093,7 @@
           <p:cNvPr id="3" name="竖排文字占位符 2">
             <a:extLst>
               <a:ext uri="{FF2B5EF4-FFF2-40B4-BE49-F238E27FC236}">
-                <a16:creationId xmlns:a16="http://schemas.microsoft.com/office/drawing/2014/main" id="{D38B8F3A-831F-C4A1-8377-9199E11BB91B}"/>
+                <a16:creationId xmlns:a16="http://schemas.microsoft.com/office/drawing/2014/main" id="{354CC10D-A792-D31F-BFAD-3D1DED6ADD17}"/>
               </a:ext>
             </a:extLst>
           </p:cNvPr>
@@ -2150,7 +2150,7 @@
           <p:cNvPr id="4" name="日期占位符 3">
             <a:extLst>
               <a:ext uri="{FF2B5EF4-FFF2-40B4-BE49-F238E27FC236}">
-                <a16:creationId xmlns:a16="http://schemas.microsoft.com/office/drawing/2014/main" id="{FFA1635A-009D-6183-37AB-DB5F1635724F}"/>
+                <a16:creationId xmlns:a16="http://schemas.microsoft.com/office/drawing/2014/main" id="{4DCAF9CA-EFCB-AF12-22E3-73BB6686FE86}"/>
               </a:ext>
             </a:extLst>
           </p:cNvPr>
@@ -2166,7 +2166,7 @@
           <a:bodyPr/>
           <a:lstStyle/>
           <a:p>
-            <a:fld id="{6558383F-8533-4D26-9F47-ABC0B8A444BA}" type="datetimeFigureOut">
+            <a:fld id="{D8EADCFA-D2A9-48F2-900D-FB1433C3EF67}" type="datetimeFigureOut">
               <a:rPr lang="zh-CN" altLang="en-US" smtClean="0"/>
               <a:t>2026/10/17</a:t>
             </a:fld>
@@ -2179,7 +2179,7 @@
           <p:cNvPr id="5" name="页脚占位符 4">
             <a:extLst>
               <a:ext uri="{FF2B5EF4-FFF2-40B4-BE49-F238E27FC236}">
-                <a16:creationId xmlns:a16="http://schemas.microsoft.com/office/drawing/2014/main" id="{1943D846-7E70-0C64-BED5-4B5A8F4744EA}"/>
+                <a16:creationId xmlns:a16="http://schemas.microsoft.com/office/drawing/2014/main" id="{32037F65-F4D1-2834-9CF1-4E9350A675DF}"/>
               </a:ext>
             </a:extLst>
           </p:cNvPr>
@@ -2204,7 +2204,7 @@
           <p:cNvPr id="6" name="灯片编号占位符 5">
             <a:extLst>
               <a:ext uri="{FF2B5EF4-FFF2-40B4-BE49-F238E27FC236}">
-                <a16:creationId xmlns:a16="http://schemas.microsoft.com/office/drawing/2014/main" id="{CFFF7D47-61FC-1B7A-CE00-AF10F165EA9C}"/>
+                <a16:creationId xmlns:a16="http://schemas.microsoft.com/office/drawing/2014/main" id="{F8165802-E885-E66B-D8CB-89EA461839A8}"/>
               </a:ext>
             </a:extLst>
           </p:cNvPr>
@@ -2220,7 +2220,7 @@
           <a:bodyPr/>
           <a:lstStyle/>
           <a:p>
-            <a:fld id="{656A01FE-623A-4092-8599-E68D430B7028}" type="slidenum">
+            <a:fld id="{C24BF5A1-B00D-40F6-8260-9C2CE100538A}" type="slidenum">
               <a:rPr lang="zh-CN" altLang="en-US" smtClean="0"/>
               <a:t>‹#›</a:t>
             </a:fld>
@@ -2231,7 +2231,7 @@
     </p:spTree>
     <p:extLst>
       <p:ext uri="{BB962C8B-B14F-4D97-AF65-F5344CB8AC3E}">
-        <p14:creationId xmlns:p14="http://schemas.microsoft.com/office/powerpoint/2010/main" val="2353900169"/>
+        <p14:creationId xmlns:p14="http://schemas.microsoft.com/office/powerpoint/2010/main" val="471554854"/>
       </p:ext>
     </p:extLst>
   </p:cSld>
@@ -2263,7 +2263,7 @@
           <p:cNvPr id="2" name="竖排标题 1">
             <a:extLst>
               <a:ext uri="{FF2B5EF4-FFF2-40B4-BE49-F238E27FC236}">
-                <a16:creationId xmlns:a16="http://schemas.microsoft.com/office/drawing/2014/main" id="{26967515-8C95-8349-2A69-CC456DD3B180}"/>
+                <a16:creationId xmlns:a16="http://schemas.microsoft.com/office/drawing/2014/main" id="{DBF96605-15BF-F2A6-255A-92CD5EED6C60}"/>
               </a:ext>
             </a:extLst>
           </p:cNvPr>
@@ -2296,7 +2296,7 @@
           <p:cNvPr id="3" name="竖排文字占位符 2">
             <a:extLst>
               <a:ext uri="{FF2B5EF4-FFF2-40B4-BE49-F238E27FC236}">
-                <a16:creationId xmlns:a16="http://schemas.microsoft.com/office/drawing/2014/main" id="{1FEB2987-CDD1-14A9-EF5D-52407A6003ED}"/>
+                <a16:creationId xmlns:a16="http://schemas.microsoft.com/office/drawing/2014/main" id="{009C479A-8EB8-B5E3-EE12-71AF23A80DC8}"/>
               </a:ext>
             </a:extLst>
           </p:cNvPr>
@@ -2358,7 +2358,7 @@
           <p:cNvPr id="4" name="日期占位符 3">
             <a:extLst>
               <a:ext uri="{FF2B5EF4-FFF2-40B4-BE49-F238E27FC236}">
-                <a16:creationId xmlns:a16="http://schemas.microsoft.com/office/drawing/2014/main" id="{FD875B01-CCD2-54C9-B67C-4DC3B7086750}"/>
+                <a16:creationId xmlns:a16="http://schemas.microsoft.com/office/drawing/2014/main" id="{F1A2D75E-BEE9-EF41-AE95-F2C822ED6867}"/>
               </a:ext>
             </a:extLst>
           </p:cNvPr>
@@ -2374,7 +2374,7 @@
           <a:bodyPr/>
           <a:lstStyle/>
           <a:p>
-            <a:fld id="{6558383F-8533-4D26-9F47-ABC0B8A444BA}" type="datetimeFigureOut">
+            <a:fld id="{D8EADCFA-D2A9-48F2-900D-FB1433C3EF67}" type="datetimeFigureOut">
               <a:rPr lang="zh-CN" altLang="en-US" smtClean="0"/>
               <a:t>2026/10/17</a:t>
             </a:fld>
@@ -2387,7 +2387,7 @@
           <p:cNvPr id="5" name="页脚占位符 4">
             <a:extLst>
               <a:ext uri="{FF2B5EF4-FFF2-40B4-BE49-F238E27FC236}">
-                <a16:creationId xmlns:a16="http://schemas.microsoft.com/office/drawing/2014/main" id="{94729ABA-0464-5359-C39F-1BE97A067C05}"/>
+                <a16:creationId xmlns:a16="http://schemas.microsoft.com/office/drawing/2014/main" id="{80CF6C53-A38C-DAB5-20B6-E69E75D59DBE}"/>
               </a:ext>
             </a:extLst>
           </p:cNvPr>
@@ -2412,7 +2412,7 @@
           <p:cNvPr id="6" name="灯片编号占位符 5">
             <a:extLst>
               <a:ext uri="{FF2B5EF4-FFF2-40B4-BE49-F238E27FC236}">
-                <a16:creationId xmlns:a16="http://schemas.microsoft.com/office/drawing/2014/main" id="{D50E1E9D-AC62-A78B-256A-F02633FAFBA3}"/>
+                <a16:creationId xmlns:a16="http://schemas.microsoft.com/office/drawing/2014/main" id="{F111E62E-C84E-2193-5E14-5CD48D8CA9E6}"/>
               </a:ext>
             </a:extLst>
           </p:cNvPr>
@@ -2428,7 +2428,7 @@
           <a:bodyPr/>
           <a:lstStyle/>
           <a:p>
-            <a:fld id="{656A01FE-623A-4092-8599-E68D430B7028}" type="slidenum">
+            <a:fld id="{C24BF5A1-B00D-40F6-8260-9C2CE100538A}" type="slidenum">
               <a:rPr lang="zh-CN" altLang="en-US" smtClean="0"/>
               <a:t>‹#›</a:t>
             </a:fld>
@@ -2439,7 +2439,7 @@
     </p:spTree>
     <p:extLst>
       <p:ext uri="{BB962C8B-B14F-4D97-AF65-F5344CB8AC3E}">
-        <p14:creationId xmlns:p14="http://schemas.microsoft.com/office/powerpoint/2010/main" val="796444900"/>
+        <p14:creationId xmlns:p14="http://schemas.microsoft.com/office/powerpoint/2010/main" val="1578013827"/>
       </p:ext>
     </p:extLst>
   </p:cSld>
@@ -2471,7 +2471,7 @@
           <p:cNvPr id="2" name="标题 1">
             <a:extLst>
               <a:ext uri="{FF2B5EF4-FFF2-40B4-BE49-F238E27FC236}">
-                <a16:creationId xmlns:a16="http://schemas.microsoft.com/office/drawing/2014/main" id="{8B186886-61FF-B06F-A421-6E1BFBC1B5C4}"/>
+                <a16:creationId xmlns:a16="http://schemas.microsoft.com/office/drawing/2014/main" id="{F48ACE64-931E-5726-CBD5-2D1103907977}"/>
               </a:ext>
             </a:extLst>
           </p:cNvPr>
@@ -2499,7 +2499,7 @@
           <p:cNvPr id="3" name="内容占位符 2">
             <a:extLst>
               <a:ext uri="{FF2B5EF4-FFF2-40B4-BE49-F238E27FC236}">
-                <a16:creationId xmlns:a16="http://schemas.microsoft.com/office/drawing/2014/main" id="{2877921C-3DD3-A86B-D6C9-246E8B0FA93C}"/>
+                <a16:creationId xmlns:a16="http://schemas.microsoft.com/office/drawing/2014/main" id="{4C758A5B-F0FF-B1BB-6EBD-FEF3940102E3}"/>
               </a:ext>
             </a:extLst>
           </p:cNvPr>
@@ -2556,7 +2556,7 @@
           <p:cNvPr id="4" name="日期占位符 3">
             <a:extLst>
               <a:ext uri="{FF2B5EF4-FFF2-40B4-BE49-F238E27FC236}">
-                <a16:creationId xmlns:a16="http://schemas.microsoft.com/office/drawing/2014/main" id="{2814D925-BBEA-DC44-326E-6067E1EEC274}"/>
+                <a16:creationId xmlns:a16="http://schemas.microsoft.com/office/drawing/2014/main" id="{C53DE2E2-B86E-8213-D56D-B806068556B7}"/>
               </a:ext>
             </a:extLst>
           </p:cNvPr>
@@ -2572,7 +2572,7 @@
           <a:bodyPr/>
           <a:lstStyle/>
           <a:p>
-            <a:fld id="{6558383F-8533-4D26-9F47-ABC0B8A444BA}" type="datetimeFigureOut">
+            <a:fld id="{D8EADCFA-D2A9-48F2-900D-FB1433C3EF67}" type="datetimeFigureOut">
               <a:rPr lang="zh-CN" altLang="en-US" smtClean="0"/>
               <a:t>2026/10/17</a:t>
             </a:fld>
@@ -2585,7 +2585,7 @@
           <p:cNvPr id="5" name="页脚占位符 4">
             <a:extLst>
               <a:ext uri="{FF2B5EF4-FFF2-40B4-BE49-F238E27FC236}">
-                <a16:creationId xmlns:a16="http://schemas.microsoft.com/office/drawing/2014/main" id="{4EC5E6D2-89D3-370C-6241-9B408B2A9DF6}"/>
+                <a16:creationId xmlns:a16="http://schemas.microsoft.com/office/drawing/2014/main" id="{0B1A31CD-8A3A-C3B4-647A-E539C9AD8193}"/>
               </a:ext>
             </a:extLst>
           </p:cNvPr>
@@ -2610,7 +2610,7 @@
           <p:cNvPr id="6" name="灯片编号占位符 5">
             <a:extLst>
               <a:ext uri="{FF2B5EF4-FFF2-40B4-BE49-F238E27FC236}">
-                <a16:creationId xmlns:a16="http://schemas.microsoft.com/office/drawing/2014/main" id="{24D1C31C-644C-1E63-4F3B-838D1235C221}"/>
+                <a16:creationId xmlns:a16="http://schemas.microsoft.com/office/drawing/2014/main" id="{1332E3B6-5AEC-7719-4B49-17CE0A7B21FD}"/>
               </a:ext>
             </a:extLst>
           </p:cNvPr>
@@ -2626,7 +2626,7 @@
           <a:bodyPr/>
           <a:lstStyle/>
           <a:p>
-            <a:fld id="{656A01FE-623A-4092-8599-E68D430B7028}" type="slidenum">
+            <a:fld id="{C24BF5A1-B00D-40F6-8260-9C2CE100538A}" type="slidenum">
               <a:rPr lang="zh-CN" altLang="en-US" smtClean="0"/>
               <a:t>‹#›</a:t>
             </a:fld>
@@ -2637,7 +2637,7 @@
     </p:spTree>
     <p:extLst>
       <p:ext uri="{BB962C8B-B14F-4D97-AF65-F5344CB8AC3E}">
-        <p14:creationId xmlns:p14="http://schemas.microsoft.com/office/powerpoint/2010/main" val="1326854158"/>
+        <p14:creationId xmlns:p14="http://schemas.microsoft.com/office/powerpoint/2010/main" val="1005941829"/>
       </p:ext>
     </p:extLst>
   </p:cSld>
@@ -2669,7 +2669,7 @@
           <p:cNvPr id="2" name="标题 1">
             <a:extLst>
               <a:ext uri="{FF2B5EF4-FFF2-40B4-BE49-F238E27FC236}">
-                <a16:creationId xmlns:a16="http://schemas.microsoft.com/office/drawing/2014/main" id="{38511153-0A4E-045B-A2A4-455AFA67EED8}"/>
+                <a16:creationId xmlns:a16="http://schemas.microsoft.com/office/drawing/2014/main" id="{BF95A81C-4D2D-ABF5-4AD4-E2888D4E050F}"/>
               </a:ext>
             </a:extLst>
           </p:cNvPr>
@@ -2706,7 +2706,7 @@
           <p:cNvPr id="3" name="文本占位符 2">
             <a:extLst>
               <a:ext uri="{FF2B5EF4-FFF2-40B4-BE49-F238E27FC236}">
-                <a16:creationId xmlns:a16="http://schemas.microsoft.com/office/drawing/2014/main" id="{3E7AAAAA-2474-0EC7-1BAE-C6128BFD8DBA}"/>
+                <a16:creationId xmlns:a16="http://schemas.microsoft.com/office/drawing/2014/main" id="{65E53D8F-84E3-E543-FD2B-DD2CEFC8857B}"/>
               </a:ext>
             </a:extLst>
           </p:cNvPr>
@@ -2831,7 +2831,7 @@
           <p:cNvPr id="4" name="日期占位符 3">
             <a:extLst>
               <a:ext uri="{FF2B5EF4-FFF2-40B4-BE49-F238E27FC236}">
-                <a16:creationId xmlns:a16="http://schemas.microsoft.com/office/drawing/2014/main" id="{F2C4DC5E-5B0E-916D-62C0-F9AFF7AE31F2}"/>
+                <a16:creationId xmlns:a16="http://schemas.microsoft.com/office/drawing/2014/main" id="{A577446C-A20F-01B0-9510-4D8BB7EEAE07}"/>
               </a:ext>
             </a:extLst>
           </p:cNvPr>
@@ -2847,7 +2847,7 @@
           <a:bodyPr/>
           <a:lstStyle/>
           <a:p>
-            <a:fld id="{6558383F-8533-4D26-9F47-ABC0B8A444BA}" type="datetimeFigureOut">
+            <a:fld id="{D8EADCFA-D2A9-48F2-900D-FB1433C3EF67}" type="datetimeFigureOut">
               <a:rPr lang="zh-CN" altLang="en-US" smtClean="0"/>
               <a:t>2026/10/17</a:t>
             </a:fld>
@@ -2860,7 +2860,7 @@
           <p:cNvPr id="5" name="页脚占位符 4">
             <a:extLst>
               <a:ext uri="{FF2B5EF4-FFF2-40B4-BE49-F238E27FC236}">
-                <a16:creationId xmlns:a16="http://schemas.microsoft.com/office/drawing/2014/main" id="{27878447-58DB-6173-5786-0D8C00DB8F97}"/>
+                <a16:creationId xmlns:a16="http://schemas.microsoft.com/office/drawing/2014/main" id="{E0FE2C52-143D-C6C0-AE52-CEF8C1386B3F}"/>
               </a:ext>
             </a:extLst>
           </p:cNvPr>
@@ -2885,7 +2885,7 @@
           <p:cNvPr id="6" name="灯片编号占位符 5">
             <a:extLst>
               <a:ext uri="{FF2B5EF4-FFF2-40B4-BE49-F238E27FC236}">
-                <a16:creationId xmlns:a16="http://schemas.microsoft.com/office/drawing/2014/main" id="{888B6209-B9DF-7332-E30C-E92D3FB0124C}"/>
+                <a16:creationId xmlns:a16="http://schemas.microsoft.com/office/drawing/2014/main" id="{641A651F-56D2-68B3-3B3A-F14E259EE20F}"/>
               </a:ext>
             </a:extLst>
           </p:cNvPr>
@@ -2901,7 +2901,7 @@
           <a:bodyPr/>
           <a:lstStyle/>
           <a:p>
-            <a:fld id="{656A01FE-623A-4092-8599-E68D430B7028}" type="slidenum">
+            <a:fld id="{C24BF5A1-B00D-40F6-8260-9C2CE100538A}" type="slidenum">
               <a:rPr lang="zh-CN" altLang="en-US" smtClean="0"/>
               <a:t>‹#›</a:t>
             </a:fld>
@@ -2912,7 +2912,7 @@
     </p:spTree>
     <p:extLst>
       <p:ext uri="{BB962C8B-B14F-4D97-AF65-F5344CB8AC3E}">
-        <p14:creationId xmlns:p14="http://schemas.microsoft.com/office/powerpoint/2010/main" val="3514821723"/>
+        <p14:creationId xmlns:p14="http://schemas.microsoft.com/office/powerpoint/2010/main" val="4283243382"/>
       </p:ext>
     </p:extLst>
   </p:cSld>
@@ -2944,7 +2944,7 @@
           <p:cNvPr id="2" name="标题 1">
             <a:extLst>
               <a:ext uri="{FF2B5EF4-FFF2-40B4-BE49-F238E27FC236}">
-                <a16:creationId xmlns:a16="http://schemas.microsoft.com/office/drawing/2014/main" id="{D56FF26C-93C9-D23E-8C35-C52FE4650021}"/>
+                <a16:creationId xmlns:a16="http://schemas.microsoft.com/office/drawing/2014/main" id="{4EB03464-5D4F-0C4A-7DF0-3184843F3ACF}"/>
               </a:ext>
             </a:extLst>
           </p:cNvPr>
@@ -2972,7 +2972,7 @@
           <p:cNvPr id="3" name="内容占位符 2">
             <a:extLst>
               <a:ext uri="{FF2B5EF4-FFF2-40B4-BE49-F238E27FC236}">
-                <a16:creationId xmlns:a16="http://schemas.microsoft.com/office/drawing/2014/main" id="{CA686DA6-F071-A5A2-39D3-A5799A576A67}"/>
+                <a16:creationId xmlns:a16="http://schemas.microsoft.com/office/drawing/2014/main" id="{2C5560C5-0BBA-9627-8F00-0567827BD664}"/>
               </a:ext>
             </a:extLst>
           </p:cNvPr>
@@ -3034,7 +3034,7 @@
           <p:cNvPr id="4" name="内容占位符 3">
             <a:extLst>
               <a:ext uri="{FF2B5EF4-FFF2-40B4-BE49-F238E27FC236}">
-                <a16:creationId xmlns:a16="http://schemas.microsoft.com/office/drawing/2014/main" id="{9398EFA0-64EE-B8C8-6B47-9599D95B7B5C}"/>
+                <a16:creationId xmlns:a16="http://schemas.microsoft.com/office/drawing/2014/main" id="{F6D41230-EA33-CD2F-9434-5596E8B92BD4}"/>
               </a:ext>
             </a:extLst>
           </p:cNvPr>
@@ -3096,7 +3096,7 @@
           <p:cNvPr id="5" name="日期占位符 4">
             <a:extLst>
               <a:ext uri="{FF2B5EF4-FFF2-40B4-BE49-F238E27FC236}">
-                <a16:creationId xmlns:a16="http://schemas.microsoft.com/office/drawing/2014/main" id="{304D2169-7018-EEDB-8669-2E6EE4560E41}"/>
+                <a16:creationId xmlns:a16="http://schemas.microsoft.com/office/drawing/2014/main" id="{3E267E3D-6E79-BCA4-066D-0914CF07C70A}"/>
               </a:ext>
             </a:extLst>
           </p:cNvPr>
@@ -3112,7 +3112,7 @@
           <a:bodyPr/>
           <a:lstStyle/>
           <a:p>
-            <a:fld id="{6558383F-8533-4D26-9F47-ABC0B8A444BA}" type="datetimeFigureOut">
+            <a:fld id="{D8EADCFA-D2A9-48F2-900D-FB1433C3EF67}" type="datetimeFigureOut">
               <a:rPr lang="zh-CN" altLang="en-US" smtClean="0"/>
               <a:t>2026/10/17</a:t>
             </a:fld>
@@ -3125,7 +3125,7 @@
           <p:cNvPr id="6" name="页脚占位符 5">
             <a:extLst>
               <a:ext uri="{FF2B5EF4-FFF2-40B4-BE49-F238E27FC236}">
-                <a16:creationId xmlns:a16="http://schemas.microsoft.com/office/drawing/2014/main" id="{74D47267-272F-F7A9-F865-79DD99364E60}"/>
+                <a16:creationId xmlns:a16="http://schemas.microsoft.com/office/drawing/2014/main" id="{0FCC77C7-0A18-FBB5-6961-4FA8D5AC3FB2}"/>
               </a:ext>
             </a:extLst>
           </p:cNvPr>
@@ -3150,7 +3150,7 @@
           <p:cNvPr id="7" name="灯片编号占位符 6">
             <a:extLst>
               <a:ext uri="{FF2B5EF4-FFF2-40B4-BE49-F238E27FC236}">
-                <a16:creationId xmlns:a16="http://schemas.microsoft.com/office/drawing/2014/main" id="{DCFC7017-2B36-4D9A-58E2-9F7C55B28CDF}"/>
+                <a16:creationId xmlns:a16="http://schemas.microsoft.com/office/drawing/2014/main" id="{4C001F67-726F-4E3A-916C-6F947EF914A6}"/>
               </a:ext>
             </a:extLst>
           </p:cNvPr>
@@ -3166,7 +3166,7 @@
           <a:bodyPr/>
           <a:lstStyle/>
           <a:p>
-            <a:fld id="{656A01FE-623A-4092-8599-E68D430B7028}" type="slidenum">
+            <a:fld id="{C24BF5A1-B00D-40F6-8260-9C2CE100538A}" type="slidenum">
               <a:rPr lang="zh-CN" altLang="en-US" smtClean="0"/>
               <a:t>‹#›</a:t>
             </a:fld>
@@ -3177,7 +3177,7 @@
     </p:spTree>
     <p:extLst>
       <p:ext uri="{BB962C8B-B14F-4D97-AF65-F5344CB8AC3E}">
-        <p14:creationId xmlns:p14="http://schemas.microsoft.com/office/powerpoint/2010/main" val="889775808"/>
+        <p14:creationId xmlns:p14="http://schemas.microsoft.com/office/powerpoint/2010/main" val="1667474174"/>
       </p:ext>
     </p:extLst>
   </p:cSld>
@@ -3209,7 +3209,7 @@
           <p:cNvPr id="2" name="标题 1">
             <a:extLst>
               <a:ext uri="{FF2B5EF4-FFF2-40B4-BE49-F238E27FC236}">
-                <a16:creationId xmlns:a16="http://schemas.microsoft.com/office/drawing/2014/main" id="{B843584E-447D-820E-790C-4B11FD1A1EEA}"/>
+                <a16:creationId xmlns:a16="http://schemas.microsoft.com/office/drawing/2014/main" id="{FE64F8BD-DF0F-6BEA-80D5-5FF0038AEEDC}"/>
               </a:ext>
             </a:extLst>
           </p:cNvPr>
@@ -3242,7 +3242,7 @@
           <p:cNvPr id="3" name="文本占位符 2">
             <a:extLst>
               <a:ext uri="{FF2B5EF4-FFF2-40B4-BE49-F238E27FC236}">
-                <a16:creationId xmlns:a16="http://schemas.microsoft.com/office/drawing/2014/main" id="{24823D24-58DB-DA81-5716-09B4CD2529B4}"/>
+                <a16:creationId xmlns:a16="http://schemas.microsoft.com/office/drawing/2014/main" id="{5511A62C-B2BC-6DCA-6F4C-56D549F42FDC}"/>
               </a:ext>
             </a:extLst>
           </p:cNvPr>
@@ -3313,7 +3313,7 @@
           <p:cNvPr id="4" name="内容占位符 3">
             <a:extLst>
               <a:ext uri="{FF2B5EF4-FFF2-40B4-BE49-F238E27FC236}">
-                <a16:creationId xmlns:a16="http://schemas.microsoft.com/office/drawing/2014/main" id="{BD002503-61B5-420A-ADED-9BA7EA1E0D35}"/>
+                <a16:creationId xmlns:a16="http://schemas.microsoft.com/office/drawing/2014/main" id="{33468380-EB55-B999-B6C0-9B1F38915751}"/>
               </a:ext>
             </a:extLst>
           </p:cNvPr>
@@ -3375,7 +3375,7 @@
           <p:cNvPr id="5" name="文本占位符 4">
             <a:extLst>
               <a:ext uri="{FF2B5EF4-FFF2-40B4-BE49-F238E27FC236}">
-                <a16:creationId xmlns:a16="http://schemas.microsoft.com/office/drawing/2014/main" id="{98D4E4E9-FC1A-2328-CD15-4C9AFCAE35D7}"/>
+                <a16:creationId xmlns:a16="http://schemas.microsoft.com/office/drawing/2014/main" id="{D82A6E06-B181-6D8F-F9AF-61C41FAE69A1}"/>
               </a:ext>
             </a:extLst>
           </p:cNvPr>
@@ -3446,7 +3446,7 @@
           <p:cNvPr id="6" name="内容占位符 5">
             <a:extLst>
               <a:ext uri="{FF2B5EF4-FFF2-40B4-BE49-F238E27FC236}">
-                <a16:creationId xmlns:a16="http://schemas.microsoft.com/office/drawing/2014/main" id="{E603A334-DE2A-039D-6FF0-AD0F44A6D59B}"/>
+                <a16:creationId xmlns:a16="http://schemas.microsoft.com/office/drawing/2014/main" id="{1F2E117C-EDBB-2CB2-586F-8AA0A092BAC1}"/>
               </a:ext>
             </a:extLst>
           </p:cNvPr>
@@ -3508,7 +3508,7 @@
           <p:cNvPr id="7" name="日期占位符 6">
             <a:extLst>
               <a:ext uri="{FF2B5EF4-FFF2-40B4-BE49-F238E27FC236}">
-                <a16:creationId xmlns:a16="http://schemas.microsoft.com/office/drawing/2014/main" id="{65B397E3-FE95-EE4A-C238-81BD3199FAD0}"/>
+                <a16:creationId xmlns:a16="http://schemas.microsoft.com/office/drawing/2014/main" id="{3CCA4D89-19EA-EC37-B3DB-A93556F73F8B}"/>
               </a:ext>
             </a:extLst>
           </p:cNvPr>
@@ -3524,7 +3524,7 @@
           <a:bodyPr/>
           <a:lstStyle/>
           <a:p>
-            <a:fld id="{6558383F-8533-4D26-9F47-ABC0B8A444BA}" type="datetimeFigureOut">
+            <a:fld id="{D8EADCFA-D2A9-48F2-900D-FB1433C3EF67}" type="datetimeFigureOut">
               <a:rPr lang="zh-CN" altLang="en-US" smtClean="0"/>
               <a:t>2026/10/17</a:t>
             </a:fld>
@@ -3537,7 +3537,7 @@
           <p:cNvPr id="8" name="页脚占位符 7">
             <a:extLst>
               <a:ext uri="{FF2B5EF4-FFF2-40B4-BE49-F238E27FC236}">
-                <a16:creationId xmlns:a16="http://schemas.microsoft.com/office/drawing/2014/main" id="{ACB9CA1E-D7B2-F354-9814-21AC18CE187E}"/>
+                <a16:creationId xmlns:a16="http://schemas.microsoft.com/office/drawing/2014/main" id="{45AB0B4A-8DB5-E2BD-74C4-415FC529F864}"/>
               </a:ext>
             </a:extLst>
           </p:cNvPr>
@@ -3562,7 +3562,7 @@
           <p:cNvPr id="9" name="灯片编号占位符 8">
             <a:extLst>
               <a:ext uri="{FF2B5EF4-FFF2-40B4-BE49-F238E27FC236}">
-                <a16:creationId xmlns:a16="http://schemas.microsoft.com/office/drawing/2014/main" id="{B5A68A06-B36E-91CC-BF9E-2A0FA286D46F}"/>
+                <a16:creationId xmlns:a16="http://schemas.microsoft.com/office/drawing/2014/main" id="{09A512A9-39F8-DE76-2269-FC4F027A9111}"/>
               </a:ext>
             </a:extLst>
           </p:cNvPr>
@@ -3578,7 +3578,7 @@
           <a:bodyPr/>
           <a:lstStyle/>
           <a:p>
-            <a:fld id="{656A01FE-623A-4092-8599-E68D430B7028}" type="slidenum">
+            <a:fld id="{C24BF5A1-B00D-40F6-8260-9C2CE100538A}" type="slidenum">
               <a:rPr lang="zh-CN" altLang="en-US" smtClean="0"/>
               <a:t>‹#›</a:t>
             </a:fld>
@@ -3589,7 +3589,7 @@
     </p:spTree>
     <p:extLst>
       <p:ext uri="{BB962C8B-B14F-4D97-AF65-F5344CB8AC3E}">
-        <p14:creationId xmlns:p14="http://schemas.microsoft.com/office/powerpoint/2010/main" val="1890606009"/>
+        <p14:creationId xmlns:p14="http://schemas.microsoft.com/office/powerpoint/2010/main" val="3772006696"/>
       </p:ext>
     </p:extLst>
   </p:cSld>
@@ -3621,7 +3621,7 @@
           <p:cNvPr id="2" name="标题 1">
             <a:extLst>
               <a:ext uri="{FF2B5EF4-FFF2-40B4-BE49-F238E27FC236}">
-                <a16:creationId xmlns:a16="http://schemas.microsoft.com/office/drawing/2014/main" id="{424820B7-0C0A-1B2C-1E69-8FC8BCC24AF3}"/>
+                <a16:creationId xmlns:a16="http://schemas.microsoft.com/office/drawing/2014/main" id="{5289F2B6-D280-DFF1-BB92-7FD021E8479D}"/>
               </a:ext>
             </a:extLst>
           </p:cNvPr>
@@ -3649,7 +3649,7 @@
           <p:cNvPr id="3" name="日期占位符 2">
             <a:extLst>
               <a:ext uri="{FF2B5EF4-FFF2-40B4-BE49-F238E27FC236}">
-                <a16:creationId xmlns:a16="http://schemas.microsoft.com/office/drawing/2014/main" id="{4BE8A67B-570A-7CF0-C09F-56CFF79C9C45}"/>
+                <a16:creationId xmlns:a16="http://schemas.microsoft.com/office/drawing/2014/main" id="{E02C4705-6AE4-A816-4EE0-21061BAFDB62}"/>
               </a:ext>
             </a:extLst>
           </p:cNvPr>
@@ -3665,7 +3665,7 @@
           <a:bodyPr/>
           <a:lstStyle/>
           <a:p>
-            <a:fld id="{6558383F-8533-4D26-9F47-ABC0B8A444BA}" type="datetimeFigureOut">
+            <a:fld id="{D8EADCFA-D2A9-48F2-900D-FB1433C3EF67}" type="datetimeFigureOut">
               <a:rPr lang="zh-CN" altLang="en-US" smtClean="0"/>
               <a:t>2026/10/17</a:t>
             </a:fld>
@@ -3678,7 +3678,7 @@
           <p:cNvPr id="4" name="页脚占位符 3">
             <a:extLst>
               <a:ext uri="{FF2B5EF4-FFF2-40B4-BE49-F238E27FC236}">
-                <a16:creationId xmlns:a16="http://schemas.microsoft.com/office/drawing/2014/main" id="{4395AE58-DAD9-FC55-C975-B52FB8B8C2E2}"/>
+                <a16:creationId xmlns:a16="http://schemas.microsoft.com/office/drawing/2014/main" id="{6978A03F-94B0-CB17-7FF9-CBD3A26B3C60}"/>
               </a:ext>
             </a:extLst>
           </p:cNvPr>
@@ -3703,7 +3703,7 @@
           <p:cNvPr id="5" name="灯片编号占位符 4">
             <a:extLst>
               <a:ext uri="{FF2B5EF4-FFF2-40B4-BE49-F238E27FC236}">
-                <a16:creationId xmlns:a16="http://schemas.microsoft.com/office/drawing/2014/main" id="{861664F4-6191-B3DB-0385-160C8BBDEAC6}"/>
+                <a16:creationId xmlns:a16="http://schemas.microsoft.com/office/drawing/2014/main" id="{07FE629F-BFD4-A316-24E1-F07F700FC1D3}"/>
               </a:ext>
             </a:extLst>
           </p:cNvPr>
@@ -3719,7 +3719,7 @@
           <a:bodyPr/>
           <a:lstStyle/>
           <a:p>
-            <a:fld id="{656A01FE-623A-4092-8599-E68D430B7028}" type="slidenum">
+            <a:fld id="{C24BF5A1-B00D-40F6-8260-9C2CE100538A}" type="slidenum">
               <a:rPr lang="zh-CN" altLang="en-US" smtClean="0"/>
               <a:t>‹#›</a:t>
             </a:fld>
@@ -3730,7 +3730,7 @@
     </p:spTree>
     <p:extLst>
       <p:ext uri="{BB962C8B-B14F-4D97-AF65-F5344CB8AC3E}">
-        <p14:creationId xmlns:p14="http://schemas.microsoft.com/office/powerpoint/2010/main" val="3001368404"/>
+        <p14:creationId xmlns:p14="http://schemas.microsoft.com/office/powerpoint/2010/main" val="4112679497"/>
       </p:ext>
     </p:extLst>
   </p:cSld>
@@ -3762,7 +3762,7 @@
           <p:cNvPr id="2" name="日期占位符 1">
             <a:extLst>
               <a:ext uri="{FF2B5EF4-FFF2-40B4-BE49-F238E27FC236}">
-                <a16:creationId xmlns:a16="http://schemas.microsoft.com/office/drawing/2014/main" id="{30100BCD-B770-7C40-7B09-3921603F81E8}"/>
+                <a16:creationId xmlns:a16="http://schemas.microsoft.com/office/drawing/2014/main" id="{2EF41906-F496-E2FA-CDA1-AB4B6A85FE7B}"/>
               </a:ext>
             </a:extLst>
           </p:cNvPr>
@@ -3778,7 +3778,7 @@
           <a:bodyPr/>
           <a:lstStyle/>
           <a:p>
-            <a:fld id="{6558383F-8533-4D26-9F47-ABC0B8A444BA}" type="datetimeFigureOut">
+            <a:fld id="{D8EADCFA-D2A9-48F2-900D-FB1433C3EF67}" type="datetimeFigureOut">
               <a:rPr lang="zh-CN" altLang="en-US" smtClean="0"/>
               <a:t>2026/10/17</a:t>
             </a:fld>
@@ -3791,7 +3791,7 @@
           <p:cNvPr id="3" name="页脚占位符 2">
             <a:extLst>
               <a:ext uri="{FF2B5EF4-FFF2-40B4-BE49-F238E27FC236}">
-                <a16:creationId xmlns:a16="http://schemas.microsoft.com/office/drawing/2014/main" id="{1F9D4C10-3B6F-4B8D-40FB-7496D2CAC92A}"/>
+                <a16:creationId xmlns:a16="http://schemas.microsoft.com/office/drawing/2014/main" id="{E5A72BB4-471C-7FDA-870E-38E2DAA1981D}"/>
               </a:ext>
             </a:extLst>
           </p:cNvPr>
@@ -3816,7 +3816,7 @@
           <p:cNvPr id="4" name="灯片编号占位符 3">
             <a:extLst>
               <a:ext uri="{FF2B5EF4-FFF2-40B4-BE49-F238E27FC236}">
-                <a16:creationId xmlns:a16="http://schemas.microsoft.com/office/drawing/2014/main" id="{B991F84B-AE14-13F4-A3D9-29A1F5AE3631}"/>
+                <a16:creationId xmlns:a16="http://schemas.microsoft.com/office/drawing/2014/main" id="{589C8005-A3F0-8B81-DA8C-B69149313BC8}"/>
               </a:ext>
             </a:extLst>
           </p:cNvPr>
@@ -3832,7 +3832,7 @@
           <a:bodyPr/>
           <a:lstStyle/>
           <a:p>
-            <a:fld id="{656A01FE-623A-4092-8599-E68D430B7028}" type="slidenum">
+            <a:fld id="{C24BF5A1-B00D-40F6-8260-9C2CE100538A}" type="slidenum">
               <a:rPr lang="zh-CN" altLang="en-US" smtClean="0"/>
               <a:t>‹#›</a:t>
             </a:fld>
@@ -3843,7 +3843,7 @@
     </p:spTree>
     <p:extLst>
       <p:ext uri="{BB962C8B-B14F-4D97-AF65-F5344CB8AC3E}">
-        <p14:creationId xmlns:p14="http://schemas.microsoft.com/office/powerpoint/2010/main" val="2412271583"/>
+        <p14:creationId xmlns:p14="http://schemas.microsoft.com/office/powerpoint/2010/main" val="3851620400"/>
       </p:ext>
     </p:extLst>
   </p:cSld>
@@ -3875,7 +3875,7 @@
           <p:cNvPr id="2" name="标题 1">
             <a:extLst>
               <a:ext uri="{FF2B5EF4-FFF2-40B4-BE49-F238E27FC236}">
-                <a16:creationId xmlns:a16="http://schemas.microsoft.com/office/drawing/2014/main" id="{57A7B879-28FD-36C8-63DA-7608501C4F08}"/>
+                <a16:creationId xmlns:a16="http://schemas.microsoft.com/office/drawing/2014/main" id="{E5E1A80B-990A-2E4C-073E-E531C787260E}"/>
               </a:ext>
             </a:extLst>
           </p:cNvPr>
@@ -3912,7 +3912,7 @@
           <p:cNvPr id="3" name="内容占位符 2">
             <a:extLst>
               <a:ext uri="{FF2B5EF4-FFF2-40B4-BE49-F238E27FC236}">
-                <a16:creationId xmlns:a16="http://schemas.microsoft.com/office/drawing/2014/main" id="{DDEF970E-2F88-3582-11E9-740DF987A5F4}"/>
+                <a16:creationId xmlns:a16="http://schemas.microsoft.com/office/drawing/2014/main" id="{EE0489EB-A145-E328-3985-D4DC5D92128F}"/>
               </a:ext>
             </a:extLst>
           </p:cNvPr>
@@ -4002,7 +4002,7 @@
           <p:cNvPr id="4" name="文本占位符 3">
             <a:extLst>
               <a:ext uri="{FF2B5EF4-FFF2-40B4-BE49-F238E27FC236}">
-                <a16:creationId xmlns:a16="http://schemas.microsoft.com/office/drawing/2014/main" id="{610C8594-C828-72C3-CA79-4CE6235F24DC}"/>
+                <a16:creationId xmlns:a16="http://schemas.microsoft.com/office/drawing/2014/main" id="{B383A496-C468-A7EB-92BB-7C4C27F4175D}"/>
               </a:ext>
             </a:extLst>
           </p:cNvPr>
@@ -4073,7 +4073,7 @@
           <p:cNvPr id="5" name="日期占位符 4">
             <a:extLst>
               <a:ext uri="{FF2B5EF4-FFF2-40B4-BE49-F238E27FC236}">
-                <a16:creationId xmlns:a16="http://schemas.microsoft.com/office/drawing/2014/main" id="{DDD98902-928B-C843-C0E7-2508CF4DAEA5}"/>
+                <a16:creationId xmlns:a16="http://schemas.microsoft.com/office/drawing/2014/main" id="{94940CC7-D844-6F1C-5F04-6732CE3072EF}"/>
               </a:ext>
             </a:extLst>
           </p:cNvPr>
@@ -4089,7 +4089,7 @@
           <a:bodyPr/>
           <a:lstStyle/>
           <a:p>
-            <a:fld id="{6558383F-8533-4D26-9F47-ABC0B8A444BA}" type="datetimeFigureOut">
+            <a:fld id="{D8EADCFA-D2A9-48F2-900D-FB1433C3EF67}" type="datetimeFigureOut">
               <a:rPr lang="zh-CN" altLang="en-US" smtClean="0"/>
               <a:t>2026/10/17</a:t>
             </a:fld>
@@ -4102,7 +4102,7 @@
           <p:cNvPr id="6" name="页脚占位符 5">
             <a:extLst>
               <a:ext uri="{FF2B5EF4-FFF2-40B4-BE49-F238E27FC236}">
-                <a16:creationId xmlns:a16="http://schemas.microsoft.com/office/drawing/2014/main" id="{B2523FD1-3FCD-EAA2-AAD9-53C97ED45072}"/>
+                <a16:creationId xmlns:a16="http://schemas.microsoft.com/office/drawing/2014/main" id="{6408B1FE-097C-CF22-B851-C57EA6A823ED}"/>
               </a:ext>
             </a:extLst>
           </p:cNvPr>
@@ -4127,7 +4127,7 @@
           <p:cNvPr id="7" name="灯片编号占位符 6">
             <a:extLst>
               <a:ext uri="{FF2B5EF4-FFF2-40B4-BE49-F238E27FC236}">
-                <a16:creationId xmlns:a16="http://schemas.microsoft.com/office/drawing/2014/main" id="{92DF17BF-C1D2-08DE-D542-4BC6CACF7BB7}"/>
+                <a16:creationId xmlns:a16="http://schemas.microsoft.com/office/drawing/2014/main" id="{8599300C-3818-D09F-7147-704BF4EFA4F7}"/>
               </a:ext>
             </a:extLst>
           </p:cNvPr>
@@ -4143,7 +4143,7 @@
           <a:bodyPr/>
           <a:lstStyle/>
           <a:p>
-            <a:fld id="{656A01FE-623A-4092-8599-E68D430B7028}" type="slidenum">
+            <a:fld id="{C24BF5A1-B00D-40F6-8260-9C2CE100538A}" type="slidenum">
               <a:rPr lang="zh-CN" altLang="en-US" smtClean="0"/>
               <a:t>‹#›</a:t>
             </a:fld>
@@ -4154,7 +4154,7 @@
     </p:spTree>
     <p:extLst>
       <p:ext uri="{BB962C8B-B14F-4D97-AF65-F5344CB8AC3E}">
-        <p14:creationId xmlns:p14="http://schemas.microsoft.com/office/powerpoint/2010/main" val="3077316794"/>
+        <p14:creationId xmlns:p14="http://schemas.microsoft.com/office/powerpoint/2010/main" val="3522016323"/>
       </p:ext>
     </p:extLst>
   </p:cSld>
@@ -4186,7 +4186,7 @@
           <p:cNvPr id="2" name="标题 1">
             <a:extLst>
               <a:ext uri="{FF2B5EF4-FFF2-40B4-BE49-F238E27FC236}">
-                <a16:creationId xmlns:a16="http://schemas.microsoft.com/office/drawing/2014/main" id="{5454957F-18A2-8EA4-1012-5608542D239C}"/>
+                <a16:creationId xmlns:a16="http://schemas.microsoft.com/office/drawing/2014/main" id="{4239EED1-D6E7-BAE0-F6AE-C0D240FE5CF2}"/>
               </a:ext>
             </a:extLst>
           </p:cNvPr>
@@ -4223,7 +4223,7 @@
           <p:cNvPr id="3" name="图片占位符 2">
             <a:extLst>
               <a:ext uri="{FF2B5EF4-FFF2-40B4-BE49-F238E27FC236}">
-                <a16:creationId xmlns:a16="http://schemas.microsoft.com/office/drawing/2014/main" id="{94180669-5D37-C1AB-B89B-E2908059D7C3}"/>
+                <a16:creationId xmlns:a16="http://schemas.microsoft.com/office/drawing/2014/main" id="{DEE24CA7-3065-66A0-3FFB-D38E283339AD}"/>
               </a:ext>
             </a:extLst>
           </p:cNvPr>
@@ -4290,7 +4290,7 @@
           <p:cNvPr id="4" name="文本占位符 3">
             <a:extLst>
               <a:ext uri="{FF2B5EF4-FFF2-40B4-BE49-F238E27FC236}">
-                <a16:creationId xmlns:a16="http://schemas.microsoft.com/office/drawing/2014/main" id="{9A29F7FB-5040-0362-8E29-E14FD8AD7F20}"/>
+                <a16:creationId xmlns:a16="http://schemas.microsoft.com/office/drawing/2014/main" id="{7A8C30D8-85B0-CA00-0D11-B06D86E9DDE2}"/>
               </a:ext>
             </a:extLst>
           </p:cNvPr>
@@ -4361,7 +4361,7 @@
           <p:cNvPr id="5" name="日期占位符 4">
             <a:extLst>
               <a:ext uri="{FF2B5EF4-FFF2-40B4-BE49-F238E27FC236}">
-                <a16:creationId xmlns:a16="http://schemas.microsoft.com/office/drawing/2014/main" id="{D6BDD2C9-9E19-BEEC-1B4E-E697A7E937C8}"/>
+                <a16:creationId xmlns:a16="http://schemas.microsoft.com/office/drawing/2014/main" id="{8F68B789-E61C-DFB1-81F9-126E2779C8CD}"/>
               </a:ext>
             </a:extLst>
           </p:cNvPr>
@@ -4377,7 +4377,7 @@
           <a:bodyPr/>
           <a:lstStyle/>
           <a:p>
-            <a:fld id="{6558383F-8533-4D26-9F47-ABC0B8A444BA}" type="datetimeFigureOut">
+            <a:fld id="{D8EADCFA-D2A9-48F2-900D-FB1433C3EF67}" type="datetimeFigureOut">
               <a:rPr lang="zh-CN" altLang="en-US" smtClean="0"/>
               <a:t>2026/10/17</a:t>
             </a:fld>
@@ -4390,7 +4390,7 @@
           <p:cNvPr id="6" name="页脚占位符 5">
             <a:extLst>
               <a:ext uri="{FF2B5EF4-FFF2-40B4-BE49-F238E27FC236}">
-                <a16:creationId xmlns:a16="http://schemas.microsoft.com/office/drawing/2014/main" id="{43C4A405-3AAA-9639-CF0F-A9AAEA075121}"/>
+                <a16:creationId xmlns:a16="http://schemas.microsoft.com/office/drawing/2014/main" id="{F601A1E9-D62F-064D-408D-29C6C5B1AC69}"/>
               </a:ext>
             </a:extLst>
           </p:cNvPr>
@@ -4415,7 +4415,7 @@
           <p:cNvPr id="7" name="灯片编号占位符 6">
             <a:extLst>
               <a:ext uri="{FF2B5EF4-FFF2-40B4-BE49-F238E27FC236}">
-                <a16:creationId xmlns:a16="http://schemas.microsoft.com/office/drawing/2014/main" id="{1F2A084A-9AC0-C7A9-BBD4-0A61E5CE73C9}"/>
+                <a16:creationId xmlns:a16="http://schemas.microsoft.com/office/drawing/2014/main" id="{01E70F26-7DA5-20A7-6F1A-7B149E80D9F1}"/>
               </a:ext>
             </a:extLst>
           </p:cNvPr>
@@ -4431,7 +4431,7 @@
           <a:bodyPr/>
           <a:lstStyle/>
           <a:p>
-            <a:fld id="{656A01FE-623A-4092-8599-E68D430B7028}" type="slidenum">
+            <a:fld id="{C24BF5A1-B00D-40F6-8260-9C2CE100538A}" type="slidenum">
               <a:rPr lang="zh-CN" altLang="en-US" smtClean="0"/>
               <a:t>‹#›</a:t>
             </a:fld>
@@ -4442,7 +4442,7 @@
     </p:spTree>
     <p:extLst>
       <p:ext uri="{BB962C8B-B14F-4D97-AF65-F5344CB8AC3E}">
-        <p14:creationId xmlns:p14="http://schemas.microsoft.com/office/powerpoint/2010/main" val="4041855669"/>
+        <p14:creationId xmlns:p14="http://schemas.microsoft.com/office/powerpoint/2010/main" val="2961812047"/>
       </p:ext>
     </p:extLst>
   </p:cSld>
@@ -4479,7 +4479,7 @@
           <p:cNvPr id="2" name="标题占位符 1">
             <a:extLst>
               <a:ext uri="{FF2B5EF4-FFF2-40B4-BE49-F238E27FC236}">
-                <a16:creationId xmlns:a16="http://schemas.microsoft.com/office/drawing/2014/main" id="{D02904DD-803F-C200-CD66-4661264C31C1}"/>
+                <a16:creationId xmlns:a16="http://schemas.microsoft.com/office/drawing/2014/main" id="{E8F013E8-A0D9-491B-2190-96F93F9EC9FC}"/>
               </a:ext>
             </a:extLst>
           </p:cNvPr>
@@ -4517,7 +4517,7 @@
           <p:cNvPr id="3" name="文本占位符 2">
             <a:extLst>
               <a:ext uri="{FF2B5EF4-FFF2-40B4-BE49-F238E27FC236}">
-                <a16:creationId xmlns:a16="http://schemas.microsoft.com/office/drawing/2014/main" id="{F090CE02-2AD4-BCD6-2D94-8174D74C6842}"/>
+                <a16:creationId xmlns:a16="http://schemas.microsoft.com/office/drawing/2014/main" id="{D17B067C-EE64-A344-2CE9-FAB4192393EA}"/>
               </a:ext>
             </a:extLst>
           </p:cNvPr>
@@ -4584,7 +4584,7 @@
           <p:cNvPr id="4" name="日期占位符 3">
             <a:extLst>
               <a:ext uri="{FF2B5EF4-FFF2-40B4-BE49-F238E27FC236}">
-                <a16:creationId xmlns:a16="http://schemas.microsoft.com/office/drawing/2014/main" id="{6042DA45-72A7-8689-CB2C-5E18E8D58019}"/>
+                <a16:creationId xmlns:a16="http://schemas.microsoft.com/office/drawing/2014/main" id="{C0AB03D0-C8EC-DE69-0B95-E1F402F57367}"/>
               </a:ext>
             </a:extLst>
           </p:cNvPr>
@@ -4618,7 +4618,7 @@
             </a:lvl1pPr>
           </a:lstStyle>
           <a:p>
-            <a:fld id="{6558383F-8533-4D26-9F47-ABC0B8A444BA}" type="datetimeFigureOut">
+            <a:fld id="{D8EADCFA-D2A9-48F2-900D-FB1433C3EF67}" type="datetimeFigureOut">
               <a:rPr lang="zh-CN" altLang="en-US" smtClean="0"/>
               <a:t>2026/10/17</a:t>
             </a:fld>
@@ -4631,7 +4631,7 @@
           <p:cNvPr id="5" name="页脚占位符 4">
             <a:extLst>
               <a:ext uri="{FF2B5EF4-FFF2-40B4-BE49-F238E27FC236}">
-                <a16:creationId xmlns:a16="http://schemas.microsoft.com/office/drawing/2014/main" id="{8FB1F9A6-9F2E-924E-9BFE-B5C36F0583CD}"/>
+                <a16:creationId xmlns:a16="http://schemas.microsoft.com/office/drawing/2014/main" id="{750C1C67-9CE0-2E64-D0F6-DE00E4BEC4BA}"/>
               </a:ext>
             </a:extLst>
           </p:cNvPr>
@@ -4674,7 +4674,7 @@
           <p:cNvPr id="6" name="灯片编号占位符 5">
             <a:extLst>
               <a:ext uri="{FF2B5EF4-FFF2-40B4-BE49-F238E27FC236}">
-                <a16:creationId xmlns:a16="http://schemas.microsoft.com/office/drawing/2014/main" id="{559F775A-5173-C7DF-4A2B-38153E7550B3}"/>
+                <a16:creationId xmlns:a16="http://schemas.microsoft.com/office/drawing/2014/main" id="{141C95C2-1A3D-301B-9D09-4079EDB4337A}"/>
               </a:ext>
             </a:extLst>
           </p:cNvPr>
@@ -4708,7 +4708,7 @@
             </a:lvl1pPr>
           </a:lstStyle>
           <a:p>
-            <a:fld id="{656A01FE-623A-4092-8599-E68D430B7028}" type="slidenum">
+            <a:fld id="{C24BF5A1-B00D-40F6-8260-9C2CE100538A}" type="slidenum">
               <a:rPr lang="zh-CN" altLang="en-US" smtClean="0"/>
               <a:t>‹#›</a:t>
             </a:fld>
@@ -4719,7 +4719,7 @@
     </p:spTree>
     <p:extLst>
       <p:ext uri="{BB962C8B-B14F-4D97-AF65-F5344CB8AC3E}">
-        <p14:creationId xmlns:p14="http://schemas.microsoft.com/office/powerpoint/2010/main" val="973036380"/>
+        <p14:creationId xmlns:p14="http://schemas.microsoft.com/office/powerpoint/2010/main" val="2661158344"/>
       </p:ext>
     </p:extLst>
   </p:cSld>
@@ -5042,7 +5042,7 @@
           <p:cNvPr id="2" name="图表 1">
             <a:extLst>
               <a:ext uri="{FF2B5EF4-FFF2-40B4-BE49-F238E27FC236}">
-                <a16:creationId xmlns:a16="http://schemas.microsoft.com/office/drawing/2014/main" id="{366D1088-6376-EEE0-F30D-7712B9DC653E}"/>
+                <a16:creationId xmlns:a16="http://schemas.microsoft.com/office/drawing/2014/main" id="{539DF9BB-8C5D-78E9-B3F9-32D603531268}"/>
               </a:ext>
             </a:extLst>
           </p:cNvPr>
@@ -5050,7 +5050,7 @@
           <p:nvPr>
             <p:extLst>
               <p:ext uri="{D42A27DB-BD31-4B8C-83A1-F6EECF244321}">
-                <p14:modId xmlns:p14="http://schemas.microsoft.com/office/powerpoint/2010/main" val="3401188001"/>
+                <p14:modId xmlns:p14="http://schemas.microsoft.com/office/powerpoint/2010/main" val="1794043043"/>
               </p:ext>
             </p:extLst>
           </p:nvPr>
@@ -5070,7 +5070,7 @@
           <p:cNvPr id="3" name="图表 2">
             <a:extLst>
               <a:ext uri="{FF2B5EF4-FFF2-40B4-BE49-F238E27FC236}">
-                <a16:creationId xmlns:a16="http://schemas.microsoft.com/office/drawing/2014/main" id="{EE1C7E6D-894C-7C55-9572-21E34519A3AE}"/>
+                <a16:creationId xmlns:a16="http://schemas.microsoft.com/office/drawing/2014/main" id="{AD27AE17-16E8-6F58-755F-6CB95C49956E}"/>
               </a:ext>
             </a:extLst>
           </p:cNvPr>
@@ -5078,7 +5078,7 @@
           <p:nvPr>
             <p:extLst>
               <p:ext uri="{D42A27DB-BD31-4B8C-83A1-F6EECF244321}">
-                <p14:modId xmlns:p14="http://schemas.microsoft.com/office/powerpoint/2010/main" val="1389724112"/>
+                <p14:modId xmlns:p14="http://schemas.microsoft.com/office/powerpoint/2010/main" val="3460803940"/>
               </p:ext>
             </p:extLst>
           </p:nvPr>
@@ -5096,7 +5096,7 @@
     </p:spTree>
     <p:extLst>
       <p:ext uri="{BB962C8B-B14F-4D97-AF65-F5344CB8AC3E}">
-        <p14:creationId xmlns:p14="http://schemas.microsoft.com/office/powerpoint/2010/main" val="2006021160"/>
+        <p14:creationId xmlns:p14="http://schemas.microsoft.com/office/powerpoint/2010/main" val="2814715518"/>
       </p:ext>
     </p:extLst>
   </p:cSld>
